--- a/01-slides/W05-Use-Case-Specification-and-Scenarios.pptx
+++ b/01-slides/W05-Use-Case-Specification-and-Scenarios.pptx
@@ -24426,7 +24426,7 @@
   <p:cSld>
     <p:spTree>
       <p:nvGrpSpPr>
-        <p:cNvPr id="503" name="" descr="&lt;Slide style={{ background: '#FFFFFF', padding: 0 }}&gt;&#10;  &lt;Box style={{ height: 72, background: '#1E4FA8', padding: '0 40px', flexDirection: 'row', alignItems: 'center', justifyContent: 'space-between' }}&gt;&#10;    &lt;Text style={{ fontSize: 15, color: '#B9CDF0', letterSpacing: 1 }}&gt;ISAD · INFORMATION SYSTEMS ANALYSIS &amp;amp; DESIGN&lt;/Text&gt;&#10;    &lt;Text style={{ fontSize: 15, color: '#B9CDF0' }}&gt;W05 · MILESTONE M1&lt;/Text&gt;&#10;  &lt;/Box&gt;&#10;  &lt;Box style={{ padding: '13px 40px 0 40px', flexDirection: 'row', alignItems: 'center', justifyContent: 'space-between' }}&gt;&#10;    &lt;Text style={{ fontSize: 29, fontWeight: 'bold', color: '#0E3F8C' }}&gt;The M1 Checklist&lt;/Text&gt;&#10;    &lt;Text style={{ fontSize: 14, color: '#1E4FA8', fontWeight: 'bold' }}&gt;34 / 38&lt;/Text&gt;&#10;  &lt;/Box&gt;&#10;  &lt;Box style={{ flex: 1, padding: '6px 40px 0 40px', justifyContent: 'center', alignItems: 'center' }}&gt;&#10;    &lt;svg width={1180} height={392} viewBox='0 0 1180 392'&gt;&#10;      &lt;text x='10' y='16' fill='#8B97A8' fontSize='13'&gt;M1 is due Sun 4 Oct. Four artefacts, one tag, one verification command.&lt;/text&gt;&#10;&#10;      &lt;g transform='translate(10,32)'&gt;&#10;        &lt;rect x='0' y='0' width='278' height='240' rx='8' fill='#F0F5FC' stroke='#1E4FA8' strokeWidth='2' /&gt;&#10;        &lt;circle cx='30' cy='30' r='14' fill='#1E4FA8' /&gt;&#10;        &lt;text x='30' y='36' textAnchor='middle' fill='#FFFFFF' fontSize='15' fontWeight='bold'&gt;1&lt;/text&gt;&#10;        &lt;text x='54' y='35' fill='#0E3F8C' fontSize='14.5' fontWeight='bold'&gt;Requirements list&lt;/text&gt;&#10;        &lt;text x='18' y='70' fill='#4A5568' fontSize='12'&gt;Every requirement testable.&lt;/text&gt;&#10;        &lt;text x='18' y='89' fill='#4A5568' fontSize='12'&gt;Functional and non-functional&lt;/text&gt;&#10;        &lt;text x='18' y='107' fill='#4A5568' fontSize='12'&gt;marked separately.&lt;/text&gt;&#10;        &lt;line x1='18' y1='126' x2='260' y2='126' stroke='#D6DCE5' strokeWidth='1' /&gt;&#10;        &lt;text x='18' y='150' fill='#1E4FA8' fontSize='11.5'&gt;docs/requirements.md&lt;/text&gt;&#10;        &lt;text x='18' y='180' fill='#8B97A8' fontSize='11.5'&gt;Tip: one row per requirement,&lt;/text&gt;&#10;        &lt;text x='18' y='197' fill='#8B97A8' fontSize='11.5'&gt;with a test column you can fill&lt;/text&gt;&#10;        &lt;text x='18' y='214' fill='#8B97A8' fontSize='11.5'&gt;in later. Empty column = bad sign.&lt;/text&gt;&#10;      &lt;/g&gt;&#10;&#10;      &lt;g transform='translate(300,32)'&gt;&#10;        &lt;rect x='0' y='0' width='278' height='240' rx='8' fill='#F0F5FC' stroke='#1E4FA8' strokeWidth='2' /&gt;&#10;        &lt;circle cx='30' cy='30' r='14' fill='#1E4FA8' /&gt;&#10;        &lt;text x='30' y='36' textAnchor='middle' fill='#FFFFFF' fontSize='15' fontWeight='bold'&gt;2&lt;/text&gt;&#10;        &lt;text x='54' y='35' fill='#0E3F8C' fontSize='14.5' fontWeight='bold'&gt;Use case diagram&lt;/text&gt;&#10;        &lt;text x='18' y='70' fill='#4A5568' fontSize='12'&gt;All actors, boundary drawn,&lt;/text&gt;&#10;        &lt;text x='18' y='89' fill='#4A5568' fontSize='12'&gt;one include and one extend&lt;/text&gt;&#10;        &lt;text x='18' y='107' fill='#4A5568' fontSize='12'&gt;labelled with a reason.&lt;/text&gt;&#10;        &lt;line x1='18' y1='126' x2='260' y2='126' stroke='#D6DCE5' strokeWidth='1' /&gt;&#10;        &lt;text x='18' y='150' fill='#1E4FA8' fontSize='11.5'&gt;docs/diagrams/use-case-v1.png&lt;/text&gt;&#10;        &lt;text x='18' y='180' fill='#8B97A8' fontSize='11.5'&gt;Both the .drawio source and&lt;/text&gt;&#10;        &lt;text x='18' y='197' fill='#8B97A8' fontSize='11.5'&gt;the .puml source are in the&lt;/text&gt;&#10;        &lt;text x='18' y='214' fill='#8B97A8' fontSize='11.5'&gt;repo. A PNG alone is not a diagram.&lt;/text&gt;&#10;      &lt;/g&gt;&#10;&#10;      &lt;g transform='translate(590,32)'&gt;&#10;        &lt;rect x='0' y='0' width='278' height='240' rx='8' fill='#FFF6E0' stroke='#FFC107' strokeWidth='2' /&gt;&#10;        &lt;circle cx='30' cy='30' r='14' fill='#996F00' /&gt;&#10;        &lt;text x='30' y='36' textAnchor='middle' fill='#FFFFFF' fontSize='15' fontWeight='bold'&gt;3&lt;/text&gt;&#10;        &lt;text x='54' y='35' fill='#996F00' fontSize='14.5' fontWeight='bold'&gt;Two full specifications&lt;/text&gt;&#10;        &lt;text x='18' y='70' fill='#4A5568' fontSize='12'&gt;Place Order plus one more.&lt;/text&gt;&#10;        &lt;text x='18' y='89' fill='#4A5568' fontSize='12'&gt;All nine fields, extensions,&lt;/text&gt;&#10;        &lt;text x='18' y='107' fill='#4A5568' fontSize='12'&gt;postconditions for every exit.&lt;/text&gt;&#10;        &lt;line x1='18' y1='126' x2='260' y2='126' stroke='#E8D9A8' strokeWidth='1' /&gt;&#10;        &lt;text x='18' y='150' fill='#996F00' fontSize='11.5'&gt;docs/use-cases/*.md&lt;/text&gt;&#10;        &lt;text x='18' y='180' fill='#8B97A8' fontSize='11.5'&gt;This is the artefact the&lt;/text&gt;&#10;        &lt;text x='18' y='197' fill='#8B97A8' fontSize='11.5'&gt;client review actually reads.&lt;/text&gt;&#10;        &lt;text x='18' y='214' fill='#8B97A8' fontSize='11.5'&gt;Budget the time for it.&lt;/text&gt;&#10;      &lt;/g&gt;&#10;&#10;      &lt;g transform='translate(880,32)'&gt;&#10;        &lt;rect x='0' y='0' width='290' height='240' rx='8' fill='#EAF6EC' stroke='#2B7A3D' strokeWidth='2' /&gt;&#10;        &lt;circle cx='30' cy='30' r='14' fill='#2B7A3D' /&gt;&#10;        &lt;text x='30' y='36' textAnchor='middle' fill='#FFFFFF' fontSize='15' fontWeight='bold'&gt;4&lt;/text&gt;&#10;        &lt;text x='54' y='35' fill='#2B7A3D' fontSize='14.5' fontWeight='bold'&gt;The tag&lt;/text&gt;&#10;        &lt;text x='18' y='70' fill='#4A5568' fontSize='12'&gt;Push is not submission.&lt;/text&gt;&#10;        &lt;text x='18' y='89' fill='#4A5568' fontSize='12'&gt;Push plus tag m1 is.&lt;/text&gt;&#10;        &lt;line x1='18' y1='108' x2='272' y2='108' stroke='#C9E0CD' strokeWidth='1' /&gt;&#10;        &lt;text x='18' y='132' fill='#2B7A3D' fontSize='11.5' fontFamily='Menlo, monospace'&gt;git tag -a m1 -m &amp;quot;M1&amp;quot;&lt;/text&gt;&#10;        &lt;text x='18' y='152' fill='#2B7A3D' fontSize='11.5' fontFamily='Menlo, monospace'&gt;git push origin m1&lt;/text&gt;&#10;        &lt;text x='18' y='182' fill='#4A5568' fontSize='11.5' fontFamily='Menlo, monospace'&gt;git ls-remote --tags origin&lt;/text&gt;&#10;        &lt;text x='18' y='204' fill='#8B97A8' fontSize='11'&gt;Run it. Read the output.&lt;/text&gt;&#10;        &lt;text x='18' y='221' fill='#8B97A8' fontSize='11'&gt;That is the verification step.&lt;/text&gt;&#10;      &lt;/g&gt;&#10;&#10;      &lt;g transform='translate(10,296)'&gt;&#10;        &lt;rect x='0' y='0' width='1160' height='76' rx='8' fill='#FDF3F3' stroke='#D9534F' strokeWidth='1.8' /&gt;&#10;        &lt;text x='20' y='28' fill='#D9534F' fontSize='14' fontWeight='bold'&gt;Two things that have cost this milestone its grade before&lt;/text&gt;&#10;        &lt;text x='20' y='52' fill='#4A5568' fontSize='12.5'&gt;1. Tagging on a commit that is not pushed yet, so the tag points at nothing the reviewer can fetch.&lt;/text&gt;&#10;        &lt;text x='20' y='68' fill='#4A5568' fontSize='12.5'&gt;2. Two specifications written by one person. The individual evidence must show four sets of handwriting.&lt;/text&gt;&#10;      &lt;/g&gt;&#10;    &lt;/svg&gt;&#10;  &lt;/Box&gt;&#10;  &lt;Box style={{ height: 34, padding: '0 40px', flexDirection: 'row', alignItems: 'center', justifyContent: 'space-between' }}&gt;&#10;    &lt;Text style={{ fontSize: 13, color: '#8B97A8' }}&gt;ISAD · Fall 2026 · Push, then tag, then verify. In that order, and every single time&lt;/Text&gt;&#10;    &lt;Text style={{ fontSize: 14, color: '#1E4FA8', fontWeight: 'bold' }}&gt;34 / 38&lt;/Text&gt;&#10;  &lt;/Box&gt;&#10;&lt;/Slide&gt;&#10;"/>
+        <p:cNvPr id="503" name="" descr="&lt;Slide style={{ background: '#FFFFFF', padding: 0 }}&gt;&#10;  &lt;Box style={{ height: 72, background: '#1E4FA8', padding: '0 40px', flexDirection: 'row', alignItems: 'center', justifyContent: 'space-between' }}&gt;&#10;    &lt;Text style={{ fontSize: 15, color: '#B9CDF0', letterSpacing: 1 }}&gt;ISAD · INFORMATION SYSTEMS ANALYSIS &amp;amp; DESIGN&lt;/Text&gt;&#10;    &lt;Text style={{ fontSize: 15, color: '#B9CDF0' }}&gt;W05 · MILESTONE M1&lt;/Text&gt;&#10;  &lt;/Box&gt;&#10;  &lt;Box style={{ padding: '13px 40px 0 40px', flexDirection: 'row', alignItems: 'center', justifyContent: 'space-between' }}&gt;&#10;    &lt;Text style={{ fontSize: 29, fontWeight: 'bold', color: '#0E3F8C' }}&gt;The M1 Checklist&lt;/Text&gt;&#10;    &lt;Text style={{ fontSize: 14, color: '#1E4FA8', fontWeight: 'bold' }}&gt;34 / 38&lt;/Text&gt;&#10;  &lt;/Box&gt;&#10;  &lt;Box style={{ flex: 1, padding: '6px 40px 0 40px', justifyContent: 'center', alignItems: 'center' }}&gt;&#10;    &lt;svg width={1180} height={392} viewBox='0 0 1180 392'&gt;&#10;      &lt;text x='10' y='16' fill='#8B97A8' fontSize='13'&gt;M1 is due Sun 25 Oct. Four artefacts, one tag, one verification command.&lt;/text&gt;&#10;&#10;      &lt;g transform='translate(10,32)'&gt;&#10;        &lt;rect x='0' y='0' width='278' height='240' rx='8' fill='#F0F5FC' stroke='#1E4FA8' strokeWidth='2' /&gt;&#10;        &lt;circle cx='30' cy='30' r='14' fill='#1E4FA8' /&gt;&#10;        &lt;text x='30' y='36' textAnchor='middle' fill='#FFFFFF' fontSize='15' fontWeight='bold'&gt;1&lt;/text&gt;&#10;        &lt;text x='54' y='35' fill='#0E3F8C' fontSize='14.5' fontWeight='bold'&gt;Requirements list&lt;/text&gt;&#10;        &lt;text x='18' y='70' fill='#4A5568' fontSize='12'&gt;Every requirement testable.&lt;/text&gt;&#10;        &lt;text x='18' y='89' fill='#4A5568' fontSize='12'&gt;Functional and non-functional&lt;/text&gt;&#10;        &lt;text x='18' y='107' fill='#4A5568' fontSize='12'&gt;marked separately.&lt;/text&gt;&#10;        &lt;line x1='18' y1='126' x2='260' y2='126' stroke='#D6DCE5' strokeWidth='1' /&gt;&#10;        &lt;text x='18' y='150' fill='#1E4FA8' fontSize='11.5'&gt;docs/requirements.md&lt;/text&gt;&#10;        &lt;text x='18' y='180' fill='#8B97A8' fontSize='11.5'&gt;Tip: one row per requirement,&lt;/text&gt;&#10;        &lt;text x='18' y='197' fill='#8B97A8' fontSize='11.5'&gt;with a test column you can fill&lt;/text&gt;&#10;        &lt;text x='18' y='214' fill='#8B97A8' fontSize='11.5'&gt;in later. Empty column = bad sign.&lt;/text&gt;&#10;      &lt;/g&gt;&#10;&#10;      &lt;g transform='translate(300,32)'&gt;&#10;        &lt;rect x='0' y='0' width='278' height='240' rx='8' fill='#F0F5FC' stroke='#1E4FA8' strokeWidth='2' /&gt;&#10;        &lt;circle cx='30' cy='30' r='14' fill='#1E4FA8' /&gt;&#10;        &lt;text x='30' y='36' textAnchor='middle' fill='#FFFFFF' fontSize='15' fontWeight='bold'&gt;2&lt;/text&gt;&#10;        &lt;text x='54' y='35' fill='#0E3F8C' fontSize='14.5' fontWeight='bold'&gt;Use case diagram&lt;/text&gt;&#10;        &lt;text x='18' y='70' fill='#4A5568' fontSize='12'&gt;All actors, boundary drawn,&lt;/text&gt;&#10;        &lt;text x='18' y='89' fill='#4A5568' fontSize='12'&gt;one include and one extend&lt;/text&gt;&#10;        &lt;text x='18' y='107' fill='#4A5568' fontSize='12'&gt;labelled with a reason.&lt;/text&gt;&#10;        &lt;line x1='18' y1='126' x2='260' y2='126' stroke='#D6DCE5' strokeWidth='1' /&gt;&#10;        &lt;text x='18' y='150' fill='#1E4FA8' fontSize='11.5'&gt;docs/diagrams/use-case-v1.png&lt;/text&gt;&#10;        &lt;text x='18' y='180' fill='#8B97A8' fontSize='11.5'&gt;Both the .drawio source and&lt;/text&gt;&#10;        &lt;text x='18' y='197' fill='#8B97A8' fontSize='11.5'&gt;the .puml source are in the&lt;/text&gt;&#10;        &lt;text x='18' y='214' fill='#8B97A8' fontSize='11.5'&gt;repo. A PNG alone is not a diagram.&lt;/text&gt;&#10;      &lt;/g&gt;&#10;&#10;      &lt;g transform='translate(590,32)'&gt;&#10;        &lt;rect x='0' y='0' width='278' height='240' rx='8' fill='#FFF6E0' stroke='#FFC107' strokeWidth='2' /&gt;&#10;        &lt;circle cx='30' cy='30' r='14' fill='#996F00' /&gt;&#10;        &lt;text x='30' y='36' textAnchor='middle' fill='#FFFFFF' fontSize='15' fontWeight='bold'&gt;3&lt;/text&gt;&#10;        &lt;text x='54' y='35' fill='#996F00' fontSize='14.5' fontWeight='bold'&gt;Two full specifications&lt;/text&gt;&#10;        &lt;text x='18' y='70' fill='#4A5568' fontSize='12'&gt;Place Order plus one more.&lt;/text&gt;&#10;        &lt;text x='18' y='89' fill='#4A5568' fontSize='12'&gt;All nine fields, extensions,&lt;/text&gt;&#10;        &lt;text x='18' y='107' fill='#4A5568' fontSize='12'&gt;postconditions for every exit.&lt;/text&gt;&#10;        &lt;line x1='18' y1='126' x2='260' y2='126' stroke='#E8D9A8' strokeWidth='1' /&gt;&#10;        &lt;text x='18' y='150' fill='#996F00' fontSize='11.5'&gt;docs/use-cases/*.md&lt;/text&gt;&#10;        &lt;text x='18' y='180' fill='#8B97A8' fontSize='11.5'&gt;This is the artefact the&lt;/text&gt;&#10;        &lt;text x='18' y='197' fill='#8B97A8' fontSize='11.5'&gt;client review actually reads.&lt;/text&gt;&#10;        &lt;text x='18' y='214' fill='#8B97A8' fontSize='11.5'&gt;Budget the time for it.&lt;/text&gt;&#10;      &lt;/g&gt;&#10;&#10;      &lt;g transform='translate(880,32)'&gt;&#10;        &lt;rect x='0' y='0' width='290' height='240' rx='8' fill='#EAF6EC' stroke='#2B7A3D' strokeWidth='2' /&gt;&#10;        &lt;circle cx='30' cy='30' r='14' fill='#2B7A3D' /&gt;&#10;        &lt;text x='30' y='36' textAnchor='middle' fill='#FFFFFF' fontSize='15' fontWeight='bold'&gt;4&lt;/text&gt;&#10;        &lt;text x='54' y='35' fill='#2B7A3D' fontSize='14.5' fontWeight='bold'&gt;The tag&lt;/text&gt;&#10;        &lt;text x='18' y='70' fill='#4A5568' fontSize='12'&gt;Push is not submission.&lt;/text&gt;&#10;        &lt;text x='18' y='89' fill='#4A5568' fontSize='12'&gt;Push plus tag m1 is.&lt;/text&gt;&#10;        &lt;line x1='18' y1='108' x2='272' y2='108' stroke='#C9E0CD' strokeWidth='1' /&gt;&#10;        &lt;text x='18' y='132' fill='#2B7A3D' fontSize='11.5' fontFamily='Menlo, monospace'&gt;git tag -a m1 -m &amp;quot;M1&amp;quot;&lt;/text&gt;&#10;        &lt;text x='18' y='152' fill='#2B7A3D' fontSize='11.5' fontFamily='Menlo, monospace'&gt;git push origin m1&lt;/text&gt;&#10;        &lt;text x='18' y='182' fill='#4A5568' fontSize='11.5' fontFamily='Menlo, monospace'&gt;git ls-remote --tags origin&lt;/text&gt;&#10;        &lt;text x='18' y='204' fill='#8B97A8' fontSize='11'&gt;Run it. Read the output.&lt;/text&gt;&#10;        &lt;text x='18' y='221' fill='#8B97A8' fontSize='11'&gt;That is the verification step.&lt;/text&gt;&#10;      &lt;/g&gt;&#10;&#10;      &lt;g transform='translate(10,296)'&gt;&#10;        &lt;rect x='0' y='0' width='1160' height='76' rx='8' fill='#FDF3F3' stroke='#D9534F' strokeWidth='1.8' /&gt;&#10;        &lt;text x='20' y='28' fill='#D9534F' fontSize='14' fontWeight='bold'&gt;Two things that have cost this milestone its grade before&lt;/text&gt;&#10;        &lt;text x='20' y='52' fill='#4A5568' fontSize='12.5'&gt;1. Tagging on a commit that is not pushed yet, so the tag points at nothing the reviewer can fetch.&lt;/text&gt;&#10;        &lt;text x='20' y='68' fill='#4A5568' fontSize='12.5'&gt;2. Two specifications written by one person. The individual evidence must show four sets of handwriting.&lt;/text&gt;&#10;      &lt;/g&gt;&#10;    &lt;/svg&gt;&#10;  &lt;/Box&gt;&#10;  &lt;Box style={{ height: 34, padding: '0 40px', flexDirection: 'row', alignItems: 'center', justifyContent: 'space-between' }}&gt;&#10;    &lt;Text style={{ fontSize: 13, color: '#8B97A8' }}&gt;ISAD · Fall 2026 · Push, then tag, then verify. In that order, and every single time&lt;/Text&gt;&#10;    &lt;Text style={{ fontSize: 14, color: '#1E4FA8', fontWeight: 'bold' }}&gt;34 / 38&lt;/Text&gt;&#10;  &lt;/Box&gt;&#10;&lt;/Slide&gt;&#10;"/>
         <p:cNvGrpSpPr/>
         <p:nvPr/>
       </p:nvGrpSpPr>
